--- a/docs/mock_slides_4x3.pptx
+++ b/docs/mock_slides_4x3.pptx
@@ -3105,7 +3105,7 @@
             <a:avLst/>
           </a:prstGeom>
           <a:solidFill>
-            <a:srgbClr val="2F3B52"/>
+            <a:srgbClr val="1D1A16"/>
           </a:solidFill>
           <a:ln>
             <a:noFill/>
@@ -3149,7 +3149,7 @@
             <a:avLst/>
           </a:prstGeom>
           <a:solidFill>
-            <a:srgbClr val="E07B39"/>
+            <a:srgbClr val="D55B2A"/>
           </a:solidFill>
           <a:ln>
             <a:noFill/>
@@ -3254,7 +3254,7 @@
             <a:avLst/>
           </a:prstGeom>
           <a:solidFill>
-            <a:srgbClr val="2F3B52"/>
+            <a:srgbClr val="1D1A16"/>
           </a:solidFill>
           <a:ln>
             <a:noFill/>
@@ -3306,7 +3306,7 @@
             <a:avLst/>
           </a:prstGeom>
           <a:solidFill>
-            <a:srgbClr val="E07B39"/>
+            <a:srgbClr val="D55B2A"/>
           </a:solidFill>
           <a:ln>
             <a:noFill/>
@@ -3384,7 +3384,7 @@
             <a:r>
               <a:rPr sz="1100" i="1">
                 <a:solidFill>
-                  <a:srgbClr val="555555"/>
+                  <a:srgbClr val="413B34"/>
                 </a:solidFill>
               </a:rPr>
               <a:t>slide_4x3  (21 x 14 cm)</a:t>
@@ -3425,7 +3425,7 @@
             <a:avLst/>
           </a:prstGeom>
           <a:solidFill>
-            <a:srgbClr val="2F3B52"/>
+            <a:srgbClr val="1D1A16"/>
           </a:solidFill>
           <a:ln>
             <a:noFill/>
@@ -3477,7 +3477,7 @@
             <a:avLst/>
           </a:prstGeom>
           <a:solidFill>
-            <a:srgbClr val="E07B39"/>
+            <a:srgbClr val="D55B2A"/>
           </a:solidFill>
           <a:ln>
             <a:noFill/>
@@ -3536,7 +3536,7 @@
             <a:r>
               <a:rPr sz="1500">
                 <a:solidFill>
-                  <a:srgbClr val="2F3B52"/>
+                  <a:srgbClr val="1D1A16"/>
                 </a:solidFill>
               </a:rPr>
               <a:t>•  Conversion rises with temperature</a:t>
@@ -3551,7 +3551,7 @@
             <a:r>
               <a:rPr sz="1500">
                 <a:solidFill>
-                  <a:srgbClr val="2F3B52"/>
+                  <a:srgbClr val="1D1A16"/>
                 </a:solidFill>
               </a:rPr>
               <a:t>•  Selectivity peaks near 250 C</a:t>
@@ -3566,7 +3566,7 @@
             <a:r>
               <a:rPr sz="1500">
                 <a:solidFill>
-                  <a:srgbClr val="2F3B52"/>
+                  <a:srgbClr val="1D1A16"/>
                 </a:solidFill>
               </a:rPr>
               <a:t>•  Model matches the measured trend</a:t>
